--- a/docs/TimeBaiBai_Service_Overview_ZH_Hant.pptx
+++ b/docs/TimeBaiBai_Service_Overview_ZH_Hant.pptx
@@ -4420,8 +4420,8 @@
         </p:blipFill>
         <p:spPr>
           <a:xfrm>
-            <a:off x="1520246" y="1188720"/>
-            <a:ext cx="5189107" cy="5120640"/>
+            <a:off x="1829437" y="1188720"/>
+            <a:ext cx="4570724" cy="5120640"/>
           </a:xfrm>
           <a:prstGeom prst="rect">
             <a:avLst/>
